--- a/business/friday_send/01_front_of_room/ATOMiK_5_Minute_Deck.pptx
+++ b/business/friday_send/01_front_of_room/ATOMiK_5_Minute_Deck.pptx
@@ -3380,7 +3380,7 @@
       </p:sp>
       <p:pic>
         <p:nvPicPr>
-          <p:cNvPr id="9" name="Picture 8" descr="09-current-live-atomik-desk-v039k.png"/>
+          <p:cNvPr id="9" name="Picture 8" descr="10-current-live-atomik-desk-v040a.png"/>
           <p:cNvPicPr>
             <a:picLocks noChangeAspect="1"/>
           </p:cNvPicPr>
@@ -5740,7 +5740,7 @@
                 </a:solidFill>
                 <a:latin typeface="Aptos"/>
               </a:rPr>
-              <a:t>Zynq UI</a:t>
+              <a:t>Zynq UI v0.40-A</a:t>
             </a:r>
           </a:p>
         </p:txBody>
@@ -5846,7 +5846,7 @@
             <a:avLst/>
           </a:prstGeom>
           <a:solidFill>
-            <a:srgbClr val="22D3EE"/>
+            <a:srgbClr val="60A5FA"/>
           </a:solidFill>
           <a:ln>
             <a:noFill/>
@@ -5908,7 +5908,7 @@
                 </a:solidFill>
                 <a:latin typeface="Aptos"/>
               </a:rPr>
-              <a:t>Linux-to-FPGA</a:t>
+              <a:t>Parallel banks</a:t>
             </a:r>
           </a:p>
         </p:txBody>
@@ -5947,7 +5947,7 @@
                 </a:solidFill>
                 <a:latin typeface="Aptos"/>
               </a:rPr>
-              <a:t>HARDWARE_VALIDATED</a:t>
+              <a:t>LIVE_MEASURED 1/2/4/8x on AX7020</a:t>
             </a:r>
           </a:p>
         </p:txBody>
@@ -6014,7 +6014,7 @@
             <a:avLst/>
           </a:prstGeom>
           <a:solidFill>
-            <a:srgbClr val="60A5FA"/>
+            <a:srgbClr val="22D3EE"/>
           </a:solidFill>
           <a:ln>
             <a:noFill/>
@@ -6076,7 +6076,7 @@
                 </a:solidFill>
                 <a:latin typeface="Aptos"/>
               </a:rPr>
-              <a:t>AX7020 matrix</a:t>
+              <a:t>Linux-to-FPGA</a:t>
             </a:r>
           </a:p>
         </p:txBody>
@@ -6115,7 +6115,7 @@
                 </a:solidFill>
                 <a:latin typeface="Aptos"/>
               </a:rPr>
-              <a:t>LIVE_MEASURED with caveats</a:t>
+              <a:t>HARDWARE_VALIDATED</a:t>
             </a:r>
           </a:p>
         </p:txBody>
@@ -6182,6 +6182,174 @@
             <a:avLst/>
           </a:prstGeom>
           <a:solidFill>
+            <a:srgbClr val="60A5FA"/>
+          </a:solidFill>
+          <a:ln>
+            <a:noFill/>
+          </a:ln>
+        </p:spPr>
+        <p:style>
+          <a:lnRef idx="1">
+            <a:schemeClr val="accent1"/>
+          </a:lnRef>
+          <a:fillRef idx="3">
+            <a:schemeClr val="accent1"/>
+          </a:fillRef>
+          <a:effectRef idx="2">
+            <a:schemeClr val="accent1"/>
+          </a:effectRef>
+          <a:fontRef idx="minor">
+            <a:schemeClr val="lt1"/>
+          </a:fontRef>
+        </p:style>
+        <p:txBody>
+          <a:bodyPr rtlCol="0" anchor="ctr"/>
+          <a:lstStyle/>
+          <a:p>
+            <a:pPr algn="ctr"/>
+          </a:p>
+        </p:txBody>
+      </p:sp>
+      <p:sp>
+        <p:nvSpPr>
+          <p:cNvPr id="22" name="TextBox 21"/>
+          <p:cNvSpPr txBox="1"/>
+          <p:nvPr/>
+        </p:nvSpPr>
+        <p:spPr>
+          <a:xfrm>
+            <a:off x="6565392" y="4251960"/>
+            <a:ext cx="4471416" cy="256032"/>
+          </a:xfrm>
+          <a:prstGeom prst="rect">
+            <a:avLst/>
+          </a:prstGeom>
+          <a:noFill/>
+        </p:spPr>
+        <p:txBody>
+          <a:bodyPr wrap="square" lIns="12700" rIns="12700" tIns="12700" bIns="12700" anchor="t">
+            <a:spAutoFit/>
+          </a:bodyPr>
+          <a:lstStyle/>
+          <a:p>
+            <a:pPr algn="l">
+              <a:spcAft>
+                <a:spcPts val="0"/>
+              </a:spcAft>
+            </a:pPr>
+            <a:r>
+              <a:rPr sz="1200" b="1">
+                <a:solidFill>
+                  <a:srgbClr val="F5F8FF"/>
+                </a:solidFill>
+                <a:latin typeface="Aptos"/>
+              </a:rPr>
+              <a:t>AX7020 matrix</a:t>
+            </a:r>
+          </a:p>
+        </p:txBody>
+      </p:sp>
+      <p:sp>
+        <p:nvSpPr>
+          <p:cNvPr id="23" name="TextBox 22"/>
+          <p:cNvSpPr txBox="1"/>
+          <p:nvPr/>
+        </p:nvSpPr>
+        <p:spPr>
+          <a:xfrm>
+            <a:off x="6565392" y="4645152"/>
+            <a:ext cx="4471416" cy="137160"/>
+          </a:xfrm>
+          <a:prstGeom prst="rect">
+            <a:avLst/>
+          </a:prstGeom>
+          <a:noFill/>
+        </p:spPr>
+        <p:txBody>
+          <a:bodyPr wrap="square" lIns="12700" rIns="12700" tIns="12700" bIns="12700" anchor="t">
+            <a:spAutoFit/>
+          </a:bodyPr>
+          <a:lstStyle/>
+          <a:p>
+            <a:pPr algn="l">
+              <a:spcAft>
+                <a:spcPts val="0"/>
+              </a:spcAft>
+            </a:pPr>
+            <a:r>
+              <a:rPr sz="1050" b="0">
+                <a:solidFill>
+                  <a:srgbClr val="A5B4C5"/>
+                </a:solidFill>
+                <a:latin typeface="Aptos"/>
+              </a:rPr>
+              <a:t>LIVE_MEASURED with caveats</a:t>
+            </a:r>
+          </a:p>
+        </p:txBody>
+      </p:sp>
+      <p:sp>
+        <p:nvSpPr>
+          <p:cNvPr id="24" name="Rounded Rectangle 23"/>
+          <p:cNvSpPr/>
+          <p:nvPr/>
+        </p:nvSpPr>
+        <p:spPr>
+          <a:xfrm>
+            <a:off x="1051560" y="5349240"/>
+            <a:ext cx="4800600" cy="960120"/>
+          </a:xfrm>
+          <a:prstGeom prst="roundRect">
+            <a:avLst>
+              <a:gd name="adj" fmla="val 8000"/>
+            </a:avLst>
+          </a:prstGeom>
+          <a:solidFill>
+            <a:srgbClr val="0C1420"/>
+          </a:solidFill>
+          <a:ln w="9525">
+            <a:solidFill>
+              <a:srgbClr val="24364D"/>
+            </a:solidFill>
+          </a:ln>
+        </p:spPr>
+        <p:style>
+          <a:lnRef idx="1">
+            <a:schemeClr val="accent1"/>
+          </a:lnRef>
+          <a:fillRef idx="3">
+            <a:schemeClr val="accent1"/>
+          </a:fillRef>
+          <a:effectRef idx="2">
+            <a:schemeClr val="accent1"/>
+          </a:effectRef>
+          <a:fontRef idx="minor">
+            <a:schemeClr val="lt1"/>
+          </a:fontRef>
+        </p:style>
+        <p:txBody>
+          <a:bodyPr rtlCol="0" anchor="ctr"/>
+          <a:lstStyle/>
+          <a:p>
+            <a:pPr algn="ctr"/>
+          </a:p>
+        </p:txBody>
+      </p:sp>
+      <p:sp>
+        <p:nvSpPr>
+          <p:cNvPr id="25" name="Rectangle 24"/>
+          <p:cNvSpPr/>
+          <p:nvPr/>
+        </p:nvSpPr>
+        <p:spPr>
+          <a:xfrm>
+            <a:off x="1216152" y="5486400"/>
+            <a:ext cx="4471416" cy="38100"/>
+          </a:xfrm>
+          <a:prstGeom prst="rect">
+            <a:avLst/>
+          </a:prstGeom>
+          <a:solidFill>
             <a:srgbClr val="A78BFA"/>
           </a:solidFill>
           <a:ln>
@@ -6212,13 +6380,13 @@
       </p:sp>
       <p:sp>
         <p:nvSpPr>
-          <p:cNvPr id="22" name="TextBox 21"/>
+          <p:cNvPr id="26" name="TextBox 25"/>
           <p:cNvSpPr txBox="1"/>
           <p:nvPr/>
         </p:nvSpPr>
         <p:spPr>
           <a:xfrm>
-            <a:off x="6565392" y="4251960"/>
+            <a:off x="1216152" y="5669280"/>
             <a:ext cx="4471416" cy="256032"/>
           </a:xfrm>
           <a:prstGeom prst="rect">
@@ -6251,13 +6419,13 @@
       </p:sp>
       <p:sp>
         <p:nvSpPr>
-          <p:cNvPr id="23" name="TextBox 22"/>
+          <p:cNvPr id="27" name="TextBox 26"/>
           <p:cNvSpPr txBox="1"/>
           <p:nvPr/>
         </p:nvSpPr>
         <p:spPr>
           <a:xfrm>
-            <a:off x="6565392" y="4645152"/>
+            <a:off x="1216152" y="6062472"/>
             <a:ext cx="4471416" cy="137160"/>
           </a:xfrm>
           <a:prstGeom prst="rect">
@@ -6290,7 +6458,7 @@
       </p:sp>
       <p:sp>
         <p:nvSpPr>
-          <p:cNvPr id="24" name="TextBox 23"/>
+          <p:cNvPr id="28" name="TextBox 27"/>
           <p:cNvSpPr txBox="1"/>
           <p:nvPr/>
         </p:nvSpPr>

--- a/business/friday_send/01_front_of_room/ATOMiK_5_Minute_Deck.pptx
+++ b/business/friday_send/01_front_of_room/ATOMiK_5_Minute_Deck.pptx
@@ -5908,7 +5908,7 @@
                 </a:solidFill>
                 <a:latin typeface="Aptos"/>
               </a:rPr>
-              <a:t>Parallel banks</a:t>
+              <a:t>Live Workloads demo</a:t>
             </a:r>
           </a:p>
         </p:txBody>
@@ -5947,7 +5947,7 @@
                 </a:solidFill>
                 <a:latin typeface="Aptos"/>
               </a:rPr>
-              <a:t>LIVE_MEASURED 1/2/4/8x on AX7020</a:t>
+              <a:t>LIVE_MEASURED 800 Mevents/s on AX7020</a:t>
             </a:r>
           </a:p>
         </p:txBody>
@@ -6014,7 +6014,7 @@
             <a:avLst/>
           </a:prstGeom>
           <a:solidFill>
-            <a:srgbClr val="22D3EE"/>
+            <a:srgbClr val="60A5FA"/>
           </a:solidFill>
           <a:ln>
             <a:noFill/>
@@ -6076,7 +6076,7 @@
                 </a:solidFill>
                 <a:latin typeface="Aptos"/>
               </a:rPr>
-              <a:t>Linux-to-FPGA</a:t>
+              <a:t>Parallel banks</a:t>
             </a:r>
           </a:p>
         </p:txBody>
@@ -6115,7 +6115,7 @@
                 </a:solidFill>
                 <a:latin typeface="Aptos"/>
               </a:rPr>
-              <a:t>HARDWARE_VALIDATED</a:t>
+              <a:t>LIVE_MEASURED 1/2/4/8x on AX7020</a:t>
             </a:r>
           </a:p>
         </p:txBody>
@@ -6182,7 +6182,7 @@
             <a:avLst/>
           </a:prstGeom>
           <a:solidFill>
-            <a:srgbClr val="60A5FA"/>
+            <a:srgbClr val="22D3EE"/>
           </a:solidFill>
           <a:ln>
             <a:noFill/>
@@ -6244,7 +6244,7 @@
                 </a:solidFill>
                 <a:latin typeface="Aptos"/>
               </a:rPr>
-              <a:t>AX7020 matrix</a:t>
+              <a:t>Linux-to-FPGA</a:t>
             </a:r>
           </a:p>
         </p:txBody>
@@ -6283,7 +6283,7 @@
                 </a:solidFill>
                 <a:latin typeface="Aptos"/>
               </a:rPr>
-              <a:t>LIVE_MEASURED with caveats</a:t>
+              <a:t>HARDWARE_VALIDATED</a:t>
             </a:r>
           </a:p>
         </p:txBody>
@@ -6350,6 +6350,174 @@
             <a:avLst/>
           </a:prstGeom>
           <a:solidFill>
+            <a:srgbClr val="60A5FA"/>
+          </a:solidFill>
+          <a:ln>
+            <a:noFill/>
+          </a:ln>
+        </p:spPr>
+        <p:style>
+          <a:lnRef idx="1">
+            <a:schemeClr val="accent1"/>
+          </a:lnRef>
+          <a:fillRef idx="3">
+            <a:schemeClr val="accent1"/>
+          </a:fillRef>
+          <a:effectRef idx="2">
+            <a:schemeClr val="accent1"/>
+          </a:effectRef>
+          <a:fontRef idx="minor">
+            <a:schemeClr val="lt1"/>
+          </a:fontRef>
+        </p:style>
+        <p:txBody>
+          <a:bodyPr rtlCol="0" anchor="ctr"/>
+          <a:lstStyle/>
+          <a:p>
+            <a:pPr algn="ctr"/>
+          </a:p>
+        </p:txBody>
+      </p:sp>
+      <p:sp>
+        <p:nvSpPr>
+          <p:cNvPr id="26" name="TextBox 25"/>
+          <p:cNvSpPr txBox="1"/>
+          <p:nvPr/>
+        </p:nvSpPr>
+        <p:spPr>
+          <a:xfrm>
+            <a:off x="1216152" y="5669280"/>
+            <a:ext cx="4471416" cy="256032"/>
+          </a:xfrm>
+          <a:prstGeom prst="rect">
+            <a:avLst/>
+          </a:prstGeom>
+          <a:noFill/>
+        </p:spPr>
+        <p:txBody>
+          <a:bodyPr wrap="square" lIns="12700" rIns="12700" tIns="12700" bIns="12700" anchor="t">
+            <a:spAutoFit/>
+          </a:bodyPr>
+          <a:lstStyle/>
+          <a:p>
+            <a:pPr algn="l">
+              <a:spcAft>
+                <a:spcPts val="0"/>
+              </a:spcAft>
+            </a:pPr>
+            <a:r>
+              <a:rPr sz="1200" b="1">
+                <a:solidFill>
+                  <a:srgbClr val="F5F8FF"/>
+                </a:solidFill>
+                <a:latin typeface="Aptos"/>
+              </a:rPr>
+              <a:t>AX7020 matrix</a:t>
+            </a:r>
+          </a:p>
+        </p:txBody>
+      </p:sp>
+      <p:sp>
+        <p:nvSpPr>
+          <p:cNvPr id="27" name="TextBox 26"/>
+          <p:cNvSpPr txBox="1"/>
+          <p:nvPr/>
+        </p:nvSpPr>
+        <p:spPr>
+          <a:xfrm>
+            <a:off x="1216152" y="6062472"/>
+            <a:ext cx="4471416" cy="137160"/>
+          </a:xfrm>
+          <a:prstGeom prst="rect">
+            <a:avLst/>
+          </a:prstGeom>
+          <a:noFill/>
+        </p:spPr>
+        <p:txBody>
+          <a:bodyPr wrap="square" lIns="12700" rIns="12700" tIns="12700" bIns="12700" anchor="t">
+            <a:spAutoFit/>
+          </a:bodyPr>
+          <a:lstStyle/>
+          <a:p>
+            <a:pPr algn="l">
+              <a:spcAft>
+                <a:spcPts val="0"/>
+              </a:spcAft>
+            </a:pPr>
+            <a:r>
+              <a:rPr sz="1050" b="0">
+                <a:solidFill>
+                  <a:srgbClr val="A5B4C5"/>
+                </a:solidFill>
+                <a:latin typeface="Aptos"/>
+              </a:rPr>
+              <a:t>LIVE_MEASURED with caveats</a:t>
+            </a:r>
+          </a:p>
+        </p:txBody>
+      </p:sp>
+      <p:sp>
+        <p:nvSpPr>
+          <p:cNvPr id="28" name="Rounded Rectangle 27"/>
+          <p:cNvSpPr/>
+          <p:nvPr/>
+        </p:nvSpPr>
+        <p:spPr>
+          <a:xfrm>
+            <a:off x="6400800" y="5349240"/>
+            <a:ext cx="4800600" cy="960120"/>
+          </a:xfrm>
+          <a:prstGeom prst="roundRect">
+            <a:avLst>
+              <a:gd name="adj" fmla="val 8000"/>
+            </a:avLst>
+          </a:prstGeom>
+          <a:solidFill>
+            <a:srgbClr val="0C1420"/>
+          </a:solidFill>
+          <a:ln w="9525">
+            <a:solidFill>
+              <a:srgbClr val="24364D"/>
+            </a:solidFill>
+          </a:ln>
+        </p:spPr>
+        <p:style>
+          <a:lnRef idx="1">
+            <a:schemeClr val="accent1"/>
+          </a:lnRef>
+          <a:fillRef idx="3">
+            <a:schemeClr val="accent1"/>
+          </a:fillRef>
+          <a:effectRef idx="2">
+            <a:schemeClr val="accent1"/>
+          </a:effectRef>
+          <a:fontRef idx="minor">
+            <a:schemeClr val="lt1"/>
+          </a:fontRef>
+        </p:style>
+        <p:txBody>
+          <a:bodyPr rtlCol="0" anchor="ctr"/>
+          <a:lstStyle/>
+          <a:p>
+            <a:pPr algn="ctr"/>
+          </a:p>
+        </p:txBody>
+      </p:sp>
+      <p:sp>
+        <p:nvSpPr>
+          <p:cNvPr id="29" name="Rectangle 28"/>
+          <p:cNvSpPr/>
+          <p:nvPr/>
+        </p:nvSpPr>
+        <p:spPr>
+          <a:xfrm>
+            <a:off x="6565392" y="5486400"/>
+            <a:ext cx="4471416" cy="38100"/>
+          </a:xfrm>
+          <a:prstGeom prst="rect">
+            <a:avLst/>
+          </a:prstGeom>
+          <a:solidFill>
             <a:srgbClr val="A78BFA"/>
           </a:solidFill>
           <a:ln>
@@ -6380,13 +6548,13 @@
       </p:sp>
       <p:sp>
         <p:nvSpPr>
-          <p:cNvPr id="26" name="TextBox 25"/>
+          <p:cNvPr id="30" name="TextBox 29"/>
           <p:cNvSpPr txBox="1"/>
           <p:nvPr/>
         </p:nvSpPr>
         <p:spPr>
           <a:xfrm>
-            <a:off x="1216152" y="5669280"/>
+            <a:off x="6565392" y="5669280"/>
             <a:ext cx="4471416" cy="256032"/>
           </a:xfrm>
           <a:prstGeom prst="rect">
@@ -6419,13 +6587,13 @@
       </p:sp>
       <p:sp>
         <p:nvSpPr>
-          <p:cNvPr id="27" name="TextBox 26"/>
+          <p:cNvPr id="31" name="TextBox 30"/>
           <p:cNvSpPr txBox="1"/>
           <p:nvPr/>
         </p:nvSpPr>
         <p:spPr>
           <a:xfrm>
-            <a:off x="1216152" y="6062472"/>
+            <a:off x="6565392" y="6062472"/>
             <a:ext cx="4471416" cy="137160"/>
           </a:xfrm>
           <a:prstGeom prst="rect">
@@ -6458,7 +6626,7 @@
       </p:sp>
       <p:sp>
         <p:nvSpPr>
-          <p:cNvPr id="28" name="TextBox 27"/>
+          <p:cNvPr id="32" name="TextBox 31"/>
           <p:cNvSpPr txBox="1"/>
           <p:nvPr/>
         </p:nvSpPr>
